--- a/assets/pptx/catalog-662.pptx
+++ b/assets/pptx/catalog-662.pptx
@@ -3300,7 +3300,7 @@
                 <a:ea typeface="Ebrima"/>
                 <a:cs typeface="Ebrima"/>
               </a:rPr>
-              <a:t>ይደንቀኛል ኢየሱስ ማዳንህ (2x)</a:t>
+              <a:t>ይደንቀኛል ኢየሱስ ማዳንህ 2x</a:t>
             </a:r>
           </a:p>
         </p:txBody>
@@ -3385,7 +3385,7 @@
                 <a:ea typeface="Ebrima"/>
                 <a:cs typeface="Ebrima"/>
               </a:rPr>
-              <a:t>ስለዚህ ዝምብዬ እደነቃለሁ (2x)</a:t>
+              <a:t>ስለዚህ ዝምብዬ እደነቃለሁ 2x</a:t>
             </a:r>
           </a:p>
         </p:txBody>
@@ -3452,7 +3452,7 @@
                 <a:ea typeface="Ebrima"/>
                 <a:cs typeface="Ebrima"/>
               </a:rPr>
-              <a:t>ልስገድልህ ልቀኝልህ (2x)</a:t>
+              <a:t>ልስገድልህ ልቀኝልህ 2x</a:t>
             </a:r>
           </a:p>
           <a:p>
@@ -3645,7 +3645,7 @@
                 <a:ea typeface="Ebrima"/>
                 <a:cs typeface="Ebrima"/>
               </a:rPr>
-              <a:t>ስለዚህ ዝምብዬ እደነቃለሁ (2x)</a:t>
+              <a:t>ስለዚህ ዝምብዬ እደነቃለሁ 2x</a:t>
             </a:r>
           </a:p>
         </p:txBody>
@@ -3712,7 +3712,7 @@
                 <a:ea typeface="Ebrima"/>
                 <a:cs typeface="Ebrima"/>
               </a:rPr>
-              <a:t>ልስገድልህ ልቀኝልህ (2x)</a:t>
+              <a:t>ልስገድልህ ልቀኝልህ 2x</a:t>
             </a:r>
           </a:p>
           <a:p>
@@ -3905,7 +3905,7 @@
                 <a:ea typeface="Ebrima"/>
                 <a:cs typeface="Ebrima"/>
               </a:rPr>
-              <a:t>ትዕግሥትህን እያሰብኩ አከብርሃለሁ (8x)</a:t>
+              <a:t>ትዕግሥትህን እያሰብኩ አከብርሃለሁ 8x</a:t>
             </a:r>
           </a:p>
         </p:txBody>
